--- a/這是耶和華所定的日子(崇拜版).pptx
+++ b/這是耶和華所定的日子(崇拜版).pptx
@@ -165,10 +165,9 @@
           <a:lstStyle/>
           <a:p>
             <a:r>
-              <a:rPr lang="zh-TW" altLang="en-US" smtClean="0"/>
+              <a:rPr lang="zh-TW" altLang="en-US"/>
               <a:t>按一下以編輯母片標題樣式</a:t>
             </a:r>
-            <a:endParaRPr lang="zh-TW" altLang="en-US"/>
           </a:p>
         </p:txBody>
       </p:sp>
@@ -284,10 +283,9 @@
           </a:lstStyle>
           <a:p>
             <a:r>
-              <a:rPr lang="zh-TW" altLang="en-US" smtClean="0"/>
+              <a:rPr lang="zh-TW" altLang="en-US"/>
               <a:t>按一下以編輯母片副標題樣式</a:t>
             </a:r>
-            <a:endParaRPr lang="zh-TW" altLang="en-US"/>
           </a:p>
         </p:txBody>
       </p:sp>
@@ -309,7 +307,7 @@
             <a:fld id="{0D553E4E-B847-41C7-BD33-263D08B19E21}" type="datetimeFigureOut">
               <a:rPr lang="zh-TW" altLang="en-US" smtClean="0"/>
               <a:pPr/>
-              <a:t>2022/1/27</a:t>
+              <a:t>2024/7/5</a:t>
             </a:fld>
             <a:endParaRPr lang="zh-TW" altLang="en-US"/>
           </a:p>
@@ -399,10 +397,9 @@
           <a:lstStyle/>
           <a:p>
             <a:r>
-              <a:rPr lang="zh-TW" altLang="en-US" smtClean="0"/>
+              <a:rPr lang="zh-TW" altLang="en-US"/>
               <a:t>按一下以編輯母片標題樣式</a:t>
             </a:r>
-            <a:endParaRPr lang="zh-TW" altLang="en-US"/>
           </a:p>
         </p:txBody>
       </p:sp>
@@ -423,38 +420,37 @@
           <a:p>
             <a:pPr lvl="0"/>
             <a:r>
-              <a:rPr lang="zh-TW" altLang="en-US" smtClean="0"/>
+              <a:rPr lang="zh-TW" altLang="en-US"/>
               <a:t>按一下以編輯母片文字樣式</a:t>
             </a:r>
           </a:p>
           <a:p>
             <a:pPr lvl="1"/>
             <a:r>
-              <a:rPr lang="zh-TW" altLang="en-US" smtClean="0"/>
+              <a:rPr lang="zh-TW" altLang="en-US"/>
               <a:t>第二層</a:t>
             </a:r>
           </a:p>
           <a:p>
             <a:pPr lvl="2"/>
             <a:r>
-              <a:rPr lang="zh-TW" altLang="en-US" smtClean="0"/>
+              <a:rPr lang="zh-TW" altLang="en-US"/>
               <a:t>第三層</a:t>
             </a:r>
           </a:p>
           <a:p>
             <a:pPr lvl="3"/>
             <a:r>
-              <a:rPr lang="zh-TW" altLang="en-US" smtClean="0"/>
+              <a:rPr lang="zh-TW" altLang="en-US"/>
               <a:t>第四層</a:t>
             </a:r>
           </a:p>
           <a:p>
             <a:pPr lvl="4"/>
             <a:r>
-              <a:rPr lang="zh-TW" altLang="en-US" smtClean="0"/>
+              <a:rPr lang="zh-TW" altLang="en-US"/>
               <a:t>第五層</a:t>
             </a:r>
-            <a:endParaRPr lang="zh-TW" altLang="en-US"/>
           </a:p>
         </p:txBody>
       </p:sp>
@@ -476,7 +472,7 @@
             <a:fld id="{0D553E4E-B847-41C7-BD33-263D08B19E21}" type="datetimeFigureOut">
               <a:rPr lang="zh-TW" altLang="en-US" smtClean="0"/>
               <a:pPr/>
-              <a:t>2022/1/27</a:t>
+              <a:t>2024/7/5</a:t>
             </a:fld>
             <a:endParaRPr lang="zh-TW" altLang="en-US"/>
           </a:p>
@@ -571,10 +567,9 @@
           <a:lstStyle/>
           <a:p>
             <a:r>
-              <a:rPr lang="zh-TW" altLang="en-US" smtClean="0"/>
+              <a:rPr lang="zh-TW" altLang="en-US"/>
               <a:t>按一下以編輯母片標題樣式</a:t>
             </a:r>
-            <a:endParaRPr lang="zh-TW" altLang="en-US"/>
           </a:p>
         </p:txBody>
       </p:sp>
@@ -600,38 +595,37 @@
           <a:p>
             <a:pPr lvl="0"/>
             <a:r>
-              <a:rPr lang="zh-TW" altLang="en-US" smtClean="0"/>
+              <a:rPr lang="zh-TW" altLang="en-US"/>
               <a:t>按一下以編輯母片文字樣式</a:t>
             </a:r>
           </a:p>
           <a:p>
             <a:pPr lvl="1"/>
             <a:r>
-              <a:rPr lang="zh-TW" altLang="en-US" smtClean="0"/>
+              <a:rPr lang="zh-TW" altLang="en-US"/>
               <a:t>第二層</a:t>
             </a:r>
           </a:p>
           <a:p>
             <a:pPr lvl="2"/>
             <a:r>
-              <a:rPr lang="zh-TW" altLang="en-US" smtClean="0"/>
+              <a:rPr lang="zh-TW" altLang="en-US"/>
               <a:t>第三層</a:t>
             </a:r>
           </a:p>
           <a:p>
             <a:pPr lvl="3"/>
             <a:r>
-              <a:rPr lang="zh-TW" altLang="en-US" smtClean="0"/>
+              <a:rPr lang="zh-TW" altLang="en-US"/>
               <a:t>第四層</a:t>
             </a:r>
           </a:p>
           <a:p>
             <a:pPr lvl="4"/>
             <a:r>
-              <a:rPr lang="zh-TW" altLang="en-US" smtClean="0"/>
+              <a:rPr lang="zh-TW" altLang="en-US"/>
               <a:t>第五層</a:t>
             </a:r>
-            <a:endParaRPr lang="zh-TW" altLang="en-US"/>
           </a:p>
         </p:txBody>
       </p:sp>
@@ -653,7 +647,7 @@
             <a:fld id="{0D553E4E-B847-41C7-BD33-263D08B19E21}" type="datetimeFigureOut">
               <a:rPr lang="zh-TW" altLang="en-US" smtClean="0"/>
               <a:pPr/>
-              <a:t>2022/1/27</a:t>
+              <a:t>2024/7/5</a:t>
             </a:fld>
             <a:endParaRPr lang="zh-TW" altLang="en-US"/>
           </a:p>
@@ -743,10 +737,9 @@
           <a:lstStyle/>
           <a:p>
             <a:r>
-              <a:rPr lang="zh-TW" altLang="en-US" smtClean="0"/>
+              <a:rPr lang="zh-TW" altLang="en-US"/>
               <a:t>按一下以編輯母片標題樣式</a:t>
             </a:r>
-            <a:endParaRPr lang="zh-TW" altLang="en-US"/>
           </a:p>
         </p:txBody>
       </p:sp>
@@ -767,38 +760,37 @@
           <a:p>
             <a:pPr lvl="0"/>
             <a:r>
-              <a:rPr lang="zh-TW" altLang="en-US" smtClean="0"/>
+              <a:rPr lang="zh-TW" altLang="en-US"/>
               <a:t>按一下以編輯母片文字樣式</a:t>
             </a:r>
           </a:p>
           <a:p>
             <a:pPr lvl="1"/>
             <a:r>
-              <a:rPr lang="zh-TW" altLang="en-US" smtClean="0"/>
+              <a:rPr lang="zh-TW" altLang="en-US"/>
               <a:t>第二層</a:t>
             </a:r>
           </a:p>
           <a:p>
             <a:pPr lvl="2"/>
             <a:r>
-              <a:rPr lang="zh-TW" altLang="en-US" smtClean="0"/>
+              <a:rPr lang="zh-TW" altLang="en-US"/>
               <a:t>第三層</a:t>
             </a:r>
           </a:p>
           <a:p>
             <a:pPr lvl="3"/>
             <a:r>
-              <a:rPr lang="zh-TW" altLang="en-US" smtClean="0"/>
+              <a:rPr lang="zh-TW" altLang="en-US"/>
               <a:t>第四層</a:t>
             </a:r>
           </a:p>
           <a:p>
             <a:pPr lvl="4"/>
             <a:r>
-              <a:rPr lang="zh-TW" altLang="en-US" smtClean="0"/>
+              <a:rPr lang="zh-TW" altLang="en-US"/>
               <a:t>第五層</a:t>
             </a:r>
-            <a:endParaRPr lang="zh-TW" altLang="en-US"/>
           </a:p>
         </p:txBody>
       </p:sp>
@@ -820,7 +812,7 @@
             <a:fld id="{0D553E4E-B847-41C7-BD33-263D08B19E21}" type="datetimeFigureOut">
               <a:rPr lang="zh-TW" altLang="en-US" smtClean="0"/>
               <a:pPr/>
-              <a:t>2022/1/27</a:t>
+              <a:t>2024/7/5</a:t>
             </a:fld>
             <a:endParaRPr lang="zh-TW" altLang="en-US"/>
           </a:p>
@@ -919,10 +911,9 @@
           </a:lstStyle>
           <a:p>
             <a:r>
-              <a:rPr lang="zh-TW" altLang="en-US" smtClean="0"/>
+              <a:rPr lang="zh-TW" altLang="en-US"/>
               <a:t>按一下以編輯母片標題樣式</a:t>
             </a:r>
-            <a:endParaRPr lang="zh-TW" altLang="en-US"/>
           </a:p>
         </p:txBody>
       </p:sp>
@@ -1039,7 +1030,7 @@
           <a:p>
             <a:pPr lvl="0"/>
             <a:r>
-              <a:rPr lang="zh-TW" altLang="en-US" smtClean="0"/>
+              <a:rPr lang="zh-TW" altLang="en-US"/>
               <a:t>按一下以編輯母片文字樣式</a:t>
             </a:r>
           </a:p>
@@ -1063,7 +1054,7 @@
             <a:fld id="{0D553E4E-B847-41C7-BD33-263D08B19E21}" type="datetimeFigureOut">
               <a:rPr lang="zh-TW" altLang="en-US" smtClean="0"/>
               <a:pPr/>
-              <a:t>2022/1/27</a:t>
+              <a:t>2024/7/5</a:t>
             </a:fld>
             <a:endParaRPr lang="zh-TW" altLang="en-US"/>
           </a:p>
@@ -1153,10 +1144,9 @@
           <a:lstStyle/>
           <a:p>
             <a:r>
-              <a:rPr lang="zh-TW" altLang="en-US" smtClean="0"/>
+              <a:rPr lang="zh-TW" altLang="en-US"/>
               <a:t>按一下以編輯母片標題樣式</a:t>
             </a:r>
-            <a:endParaRPr lang="zh-TW" altLang="en-US"/>
           </a:p>
         </p:txBody>
       </p:sp>
@@ -1210,38 +1200,37 @@
           <a:p>
             <a:pPr lvl="0"/>
             <a:r>
-              <a:rPr lang="zh-TW" altLang="en-US" smtClean="0"/>
+              <a:rPr lang="zh-TW" altLang="en-US"/>
               <a:t>按一下以編輯母片文字樣式</a:t>
             </a:r>
           </a:p>
           <a:p>
             <a:pPr lvl="1"/>
             <a:r>
-              <a:rPr lang="zh-TW" altLang="en-US" smtClean="0"/>
+              <a:rPr lang="zh-TW" altLang="en-US"/>
               <a:t>第二層</a:t>
             </a:r>
           </a:p>
           <a:p>
             <a:pPr lvl="2"/>
             <a:r>
-              <a:rPr lang="zh-TW" altLang="en-US" smtClean="0"/>
+              <a:rPr lang="zh-TW" altLang="en-US"/>
               <a:t>第三層</a:t>
             </a:r>
           </a:p>
           <a:p>
             <a:pPr lvl="3"/>
             <a:r>
-              <a:rPr lang="zh-TW" altLang="en-US" smtClean="0"/>
+              <a:rPr lang="zh-TW" altLang="en-US"/>
               <a:t>第四層</a:t>
             </a:r>
           </a:p>
           <a:p>
             <a:pPr lvl="4"/>
             <a:r>
-              <a:rPr lang="zh-TW" altLang="en-US" smtClean="0"/>
+              <a:rPr lang="zh-TW" altLang="en-US"/>
               <a:t>第五層</a:t>
             </a:r>
-            <a:endParaRPr lang="zh-TW" altLang="en-US"/>
           </a:p>
         </p:txBody>
       </p:sp>
@@ -1295,38 +1284,37 @@
           <a:p>
             <a:pPr lvl="0"/>
             <a:r>
-              <a:rPr lang="zh-TW" altLang="en-US" smtClean="0"/>
+              <a:rPr lang="zh-TW" altLang="en-US"/>
               <a:t>按一下以編輯母片文字樣式</a:t>
             </a:r>
           </a:p>
           <a:p>
             <a:pPr lvl="1"/>
             <a:r>
-              <a:rPr lang="zh-TW" altLang="en-US" smtClean="0"/>
+              <a:rPr lang="zh-TW" altLang="en-US"/>
               <a:t>第二層</a:t>
             </a:r>
           </a:p>
           <a:p>
             <a:pPr lvl="2"/>
             <a:r>
-              <a:rPr lang="zh-TW" altLang="en-US" smtClean="0"/>
+              <a:rPr lang="zh-TW" altLang="en-US"/>
               <a:t>第三層</a:t>
             </a:r>
           </a:p>
           <a:p>
             <a:pPr lvl="3"/>
             <a:r>
-              <a:rPr lang="zh-TW" altLang="en-US" smtClean="0"/>
+              <a:rPr lang="zh-TW" altLang="en-US"/>
               <a:t>第四層</a:t>
             </a:r>
           </a:p>
           <a:p>
             <a:pPr lvl="4"/>
             <a:r>
-              <a:rPr lang="zh-TW" altLang="en-US" smtClean="0"/>
+              <a:rPr lang="zh-TW" altLang="en-US"/>
               <a:t>第五層</a:t>
             </a:r>
-            <a:endParaRPr lang="zh-TW" altLang="en-US"/>
           </a:p>
         </p:txBody>
       </p:sp>
@@ -1348,7 +1336,7 @@
             <a:fld id="{0D553E4E-B847-41C7-BD33-263D08B19E21}" type="datetimeFigureOut">
               <a:rPr lang="zh-TW" altLang="en-US" smtClean="0"/>
               <a:pPr/>
-              <a:t>2022/1/27</a:t>
+              <a:t>2024/7/5</a:t>
             </a:fld>
             <a:endParaRPr lang="zh-TW" altLang="en-US"/>
           </a:p>
@@ -1442,10 +1430,9 @@
           </a:lstStyle>
           <a:p>
             <a:r>
-              <a:rPr lang="zh-TW" altLang="en-US" smtClean="0"/>
+              <a:rPr lang="zh-TW" altLang="en-US"/>
               <a:t>按一下以編輯母片標題樣式</a:t>
             </a:r>
-            <a:endParaRPr lang="zh-TW" altLang="en-US"/>
           </a:p>
         </p:txBody>
       </p:sp>
@@ -1508,7 +1495,7 @@
           <a:p>
             <a:pPr lvl="0"/>
             <a:r>
-              <a:rPr lang="zh-TW" altLang="en-US" smtClean="0"/>
+              <a:rPr lang="zh-TW" altLang="en-US"/>
               <a:t>按一下以編輯母片文字樣式</a:t>
             </a:r>
           </a:p>
@@ -1564,38 +1551,37 @@
           <a:p>
             <a:pPr lvl="0"/>
             <a:r>
-              <a:rPr lang="zh-TW" altLang="en-US" smtClean="0"/>
+              <a:rPr lang="zh-TW" altLang="en-US"/>
               <a:t>按一下以編輯母片文字樣式</a:t>
             </a:r>
           </a:p>
           <a:p>
             <a:pPr lvl="1"/>
             <a:r>
-              <a:rPr lang="zh-TW" altLang="en-US" smtClean="0"/>
+              <a:rPr lang="zh-TW" altLang="en-US"/>
               <a:t>第二層</a:t>
             </a:r>
           </a:p>
           <a:p>
             <a:pPr lvl="2"/>
             <a:r>
-              <a:rPr lang="zh-TW" altLang="en-US" smtClean="0"/>
+              <a:rPr lang="zh-TW" altLang="en-US"/>
               <a:t>第三層</a:t>
             </a:r>
           </a:p>
           <a:p>
             <a:pPr lvl="3"/>
             <a:r>
-              <a:rPr lang="zh-TW" altLang="en-US" smtClean="0"/>
+              <a:rPr lang="zh-TW" altLang="en-US"/>
               <a:t>第四層</a:t>
             </a:r>
           </a:p>
           <a:p>
             <a:pPr lvl="4"/>
             <a:r>
-              <a:rPr lang="zh-TW" altLang="en-US" smtClean="0"/>
+              <a:rPr lang="zh-TW" altLang="en-US"/>
               <a:t>第五層</a:t>
             </a:r>
-            <a:endParaRPr lang="zh-TW" altLang="en-US"/>
           </a:p>
         </p:txBody>
       </p:sp>
@@ -1658,7 +1644,7 @@
           <a:p>
             <a:pPr lvl="0"/>
             <a:r>
-              <a:rPr lang="zh-TW" altLang="en-US" smtClean="0"/>
+              <a:rPr lang="zh-TW" altLang="en-US"/>
               <a:t>按一下以編輯母片文字樣式</a:t>
             </a:r>
           </a:p>
@@ -1714,38 +1700,37 @@
           <a:p>
             <a:pPr lvl="0"/>
             <a:r>
-              <a:rPr lang="zh-TW" altLang="en-US" smtClean="0"/>
+              <a:rPr lang="zh-TW" altLang="en-US"/>
               <a:t>按一下以編輯母片文字樣式</a:t>
             </a:r>
           </a:p>
           <a:p>
             <a:pPr lvl="1"/>
             <a:r>
-              <a:rPr lang="zh-TW" altLang="en-US" smtClean="0"/>
+              <a:rPr lang="zh-TW" altLang="en-US"/>
               <a:t>第二層</a:t>
             </a:r>
           </a:p>
           <a:p>
             <a:pPr lvl="2"/>
             <a:r>
-              <a:rPr lang="zh-TW" altLang="en-US" smtClean="0"/>
+              <a:rPr lang="zh-TW" altLang="en-US"/>
               <a:t>第三層</a:t>
             </a:r>
           </a:p>
           <a:p>
             <a:pPr lvl="3"/>
             <a:r>
-              <a:rPr lang="zh-TW" altLang="en-US" smtClean="0"/>
+              <a:rPr lang="zh-TW" altLang="en-US"/>
               <a:t>第四層</a:t>
             </a:r>
           </a:p>
           <a:p>
             <a:pPr lvl="4"/>
             <a:r>
-              <a:rPr lang="zh-TW" altLang="en-US" smtClean="0"/>
+              <a:rPr lang="zh-TW" altLang="en-US"/>
               <a:t>第五層</a:t>
             </a:r>
-            <a:endParaRPr lang="zh-TW" altLang="en-US"/>
           </a:p>
         </p:txBody>
       </p:sp>
@@ -1767,7 +1752,7 @@
             <a:fld id="{0D553E4E-B847-41C7-BD33-263D08B19E21}" type="datetimeFigureOut">
               <a:rPr lang="zh-TW" altLang="en-US" smtClean="0"/>
               <a:pPr/>
-              <a:t>2022/1/27</a:t>
+              <a:t>2024/7/5</a:t>
             </a:fld>
             <a:endParaRPr lang="zh-TW" altLang="en-US"/>
           </a:p>
@@ -1857,10 +1842,9 @@
           <a:lstStyle/>
           <a:p>
             <a:r>
-              <a:rPr lang="zh-TW" altLang="en-US" smtClean="0"/>
+              <a:rPr lang="zh-TW" altLang="en-US"/>
               <a:t>按一下以編輯母片標題樣式</a:t>
             </a:r>
-            <a:endParaRPr lang="zh-TW" altLang="en-US"/>
           </a:p>
         </p:txBody>
       </p:sp>
@@ -1882,7 +1866,7 @@
             <a:fld id="{0D553E4E-B847-41C7-BD33-263D08B19E21}" type="datetimeFigureOut">
               <a:rPr lang="zh-TW" altLang="en-US" smtClean="0"/>
               <a:pPr/>
-              <a:t>2022/1/27</a:t>
+              <a:t>2024/7/5</a:t>
             </a:fld>
             <a:endParaRPr lang="zh-TW" altLang="en-US"/>
           </a:p>
@@ -1974,7 +1958,7 @@
             <a:fld id="{0D553E4E-B847-41C7-BD33-263D08B19E21}" type="datetimeFigureOut">
               <a:rPr lang="zh-TW" altLang="en-US" smtClean="0"/>
               <a:pPr/>
-              <a:t>2022/1/27</a:t>
+              <a:t>2024/7/5</a:t>
             </a:fld>
             <a:endParaRPr lang="zh-TW" altLang="en-US"/>
           </a:p>
@@ -2073,10 +2057,9 @@
           </a:lstStyle>
           <a:p>
             <a:r>
-              <a:rPr lang="zh-TW" altLang="en-US" smtClean="0"/>
+              <a:rPr lang="zh-TW" altLang="en-US"/>
               <a:t>按一下以編輯母片標題樣式</a:t>
             </a:r>
-            <a:endParaRPr lang="zh-TW" altLang="en-US"/>
           </a:p>
         </p:txBody>
       </p:sp>
@@ -2130,38 +2113,37 @@
           <a:p>
             <a:pPr lvl="0"/>
             <a:r>
-              <a:rPr lang="zh-TW" altLang="en-US" smtClean="0"/>
+              <a:rPr lang="zh-TW" altLang="en-US"/>
               <a:t>按一下以編輯母片文字樣式</a:t>
             </a:r>
           </a:p>
           <a:p>
             <a:pPr lvl="1"/>
             <a:r>
-              <a:rPr lang="zh-TW" altLang="en-US" smtClean="0"/>
+              <a:rPr lang="zh-TW" altLang="en-US"/>
               <a:t>第二層</a:t>
             </a:r>
           </a:p>
           <a:p>
             <a:pPr lvl="2"/>
             <a:r>
-              <a:rPr lang="zh-TW" altLang="en-US" smtClean="0"/>
+              <a:rPr lang="zh-TW" altLang="en-US"/>
               <a:t>第三層</a:t>
             </a:r>
           </a:p>
           <a:p>
             <a:pPr lvl="3"/>
             <a:r>
-              <a:rPr lang="zh-TW" altLang="en-US" smtClean="0"/>
+              <a:rPr lang="zh-TW" altLang="en-US"/>
               <a:t>第四層</a:t>
             </a:r>
           </a:p>
           <a:p>
             <a:pPr lvl="4"/>
             <a:r>
-              <a:rPr lang="zh-TW" altLang="en-US" smtClean="0"/>
+              <a:rPr lang="zh-TW" altLang="en-US"/>
               <a:t>第五層</a:t>
             </a:r>
-            <a:endParaRPr lang="zh-TW" altLang="en-US"/>
           </a:p>
         </p:txBody>
       </p:sp>
@@ -2224,7 +2206,7 @@
           <a:p>
             <a:pPr lvl="0"/>
             <a:r>
-              <a:rPr lang="zh-TW" altLang="en-US" smtClean="0"/>
+              <a:rPr lang="zh-TW" altLang="en-US"/>
               <a:t>按一下以編輯母片文字樣式</a:t>
             </a:r>
           </a:p>
@@ -2248,7 +2230,7 @@
             <a:fld id="{0D553E4E-B847-41C7-BD33-263D08B19E21}" type="datetimeFigureOut">
               <a:rPr lang="zh-TW" altLang="en-US" smtClean="0"/>
               <a:pPr/>
-              <a:t>2022/1/27</a:t>
+              <a:t>2024/7/5</a:t>
             </a:fld>
             <a:endParaRPr lang="zh-TW" altLang="en-US"/>
           </a:p>
@@ -2347,10 +2329,9 @@
           </a:lstStyle>
           <a:p>
             <a:r>
-              <a:rPr lang="zh-TW" altLang="en-US" smtClean="0"/>
+              <a:rPr lang="zh-TW" altLang="en-US"/>
               <a:t>按一下以編輯母片標題樣式</a:t>
             </a:r>
-            <a:endParaRPr lang="zh-TW" altLang="en-US"/>
           </a:p>
         </p:txBody>
       </p:sp>
@@ -2412,10 +2393,9 @@
           </a:lstStyle>
           <a:p>
             <a:r>
-              <a:rPr lang="zh-TW" altLang="en-US" smtClean="0"/>
+              <a:rPr lang="zh-TW" altLang="en-US"/>
               <a:t>按一下圖示以新增圖片</a:t>
             </a:r>
-            <a:endParaRPr lang="zh-TW" altLang="en-US"/>
           </a:p>
         </p:txBody>
       </p:sp>
@@ -2478,7 +2458,7 @@
           <a:p>
             <a:pPr lvl="0"/>
             <a:r>
-              <a:rPr lang="zh-TW" altLang="en-US" smtClean="0"/>
+              <a:rPr lang="zh-TW" altLang="en-US"/>
               <a:t>按一下以編輯母片文字樣式</a:t>
             </a:r>
           </a:p>
@@ -2502,7 +2482,7 @@
             <a:fld id="{0D553E4E-B847-41C7-BD33-263D08B19E21}" type="datetimeFigureOut">
               <a:rPr lang="zh-TW" altLang="en-US" smtClean="0"/>
               <a:pPr/>
-              <a:t>2022/1/27</a:t>
+              <a:t>2024/7/5</a:t>
             </a:fld>
             <a:endParaRPr lang="zh-TW" altLang="en-US"/>
           </a:p>
@@ -2612,10 +2592,9 @@
           <a:lstStyle/>
           <a:p>
             <a:r>
-              <a:rPr lang="zh-TW" altLang="en-US" smtClean="0"/>
+              <a:rPr lang="zh-TW" altLang="en-US"/>
               <a:t>按一下以編輯母片標題樣式</a:t>
             </a:r>
-            <a:endParaRPr lang="zh-TW" altLang="en-US"/>
           </a:p>
         </p:txBody>
       </p:sp>
@@ -2646,38 +2625,37 @@
           <a:p>
             <a:pPr lvl="0"/>
             <a:r>
-              <a:rPr lang="zh-TW" altLang="en-US" smtClean="0"/>
+              <a:rPr lang="zh-TW" altLang="en-US"/>
               <a:t>按一下以編輯母片文字樣式</a:t>
             </a:r>
           </a:p>
           <a:p>
             <a:pPr lvl="1"/>
             <a:r>
-              <a:rPr lang="zh-TW" altLang="en-US" smtClean="0"/>
+              <a:rPr lang="zh-TW" altLang="en-US"/>
               <a:t>第二層</a:t>
             </a:r>
           </a:p>
           <a:p>
             <a:pPr lvl="2"/>
             <a:r>
-              <a:rPr lang="zh-TW" altLang="en-US" smtClean="0"/>
+              <a:rPr lang="zh-TW" altLang="en-US"/>
               <a:t>第三層</a:t>
             </a:r>
           </a:p>
           <a:p>
             <a:pPr lvl="3"/>
             <a:r>
-              <a:rPr lang="zh-TW" altLang="en-US" smtClean="0"/>
+              <a:rPr lang="zh-TW" altLang="en-US"/>
               <a:t>第四層</a:t>
             </a:r>
           </a:p>
           <a:p>
             <a:pPr lvl="4"/>
             <a:r>
-              <a:rPr lang="zh-TW" altLang="en-US" smtClean="0"/>
+              <a:rPr lang="zh-TW" altLang="en-US"/>
               <a:t>第五層</a:t>
             </a:r>
-            <a:endParaRPr lang="zh-TW" altLang="en-US"/>
           </a:p>
         </p:txBody>
       </p:sp>
@@ -2717,7 +2695,7 @@
             <a:fld id="{0D553E4E-B847-41C7-BD33-263D08B19E21}" type="datetimeFigureOut">
               <a:rPr lang="zh-TW" altLang="en-US" smtClean="0"/>
               <a:pPr/>
-              <a:t>2022/1/27</a:t>
+              <a:t>2024/7/5</a:t>
             </a:fld>
             <a:endParaRPr lang="zh-TW" altLang="en-US"/>
           </a:p>
@@ -3125,24 +3103,7 @@
                 <a:latin typeface="微軟正黑體" pitchFamily="34" charset="-120"/>
                 <a:ea typeface="微軟正黑體" pitchFamily="34" charset="-120"/>
               </a:rPr>
-              <a:t>這</a:t>
-            </a:r>
-            <a:r>
-              <a:rPr lang="zh-TW" altLang="en-US" sz="7200" b="1" i="1" dirty="0">
-                <a:solidFill>
-                  <a:srgbClr val="000066"/>
-                </a:solidFill>
-                <a:effectLst>
-                  <a:outerShdw blurRad="38100" dist="38100" dir="2700000" algn="tl">
-                    <a:srgbClr val="000000">
-                      <a:alpha val="43137"/>
-                    </a:srgbClr>
-                  </a:outerShdw>
-                </a:effectLst>
-                <a:latin typeface="微軟正黑體" pitchFamily="34" charset="-120"/>
-                <a:ea typeface="微軟正黑體" pitchFamily="34" charset="-120"/>
-              </a:rPr>
-              <a:t>是耶和華所定的日子</a:t>
+              <a:t>這是耶和華所定的日子</a:t>
             </a:r>
           </a:p>
         </p:txBody>
@@ -3252,8 +3213,8 @@
         </p:nvSpPr>
         <p:spPr>
           <a:xfrm>
-            <a:off x="0" y="5157193"/>
-            <a:ext cx="12192000" cy="830997"/>
+            <a:off x="0" y="5249525"/>
+            <a:ext cx="12192000" cy="646331"/>
           </a:xfrm>
           <a:prstGeom prst="rect">
             <a:avLst/>
@@ -3268,7 +3229,7 @@
           <a:p>
             <a:pPr algn="ctr"/>
             <a:r>
-              <a:rPr lang="en-US" sz="4800" b="1" dirty="0">
+              <a:rPr lang="en-US" sz="3600" b="1" dirty="0">
                 <a:solidFill>
                   <a:srgbClr val="000066"/>
                 </a:solidFill>
@@ -3279,7 +3240,7 @@
               <a:t>( </a:t>
             </a:r>
             <a:r>
-              <a:rPr lang="zh-CN" altLang="en-US" sz="4800" b="1" dirty="0">
+              <a:rPr lang="zh-CN" altLang="en-US" sz="3600" b="1" dirty="0">
                 <a:solidFill>
                   <a:srgbClr val="000066"/>
                 </a:solidFill>
@@ -3290,7 +3251,17 @@
               <a:t>正</a:t>
             </a:r>
             <a:r>
-              <a:rPr lang="en-US" sz="4800" b="1" dirty="0">
+              <a:rPr lang="zh-CN" altLang="en-US" sz="3600" b="1" dirty="0">
+                <a:solidFill>
+                  <a:srgbClr val="000066"/>
+                </a:solidFill>
+                <a:latin typeface="Microsoft JhengHei" panose="020B0604030504040204" pitchFamily="34" charset="-120"/>
+                <a:ea typeface="Microsoft JhengHei" panose="020B0604030504040204" pitchFamily="34" charset="-120"/>
+              </a:rPr>
+              <a:t>歌</a:t>
+            </a:r>
+            <a:r>
+              <a:rPr lang="en-US" sz="3600" b="1" dirty="0">
                 <a:solidFill>
                   <a:srgbClr val="000066"/>
                 </a:solidFill>
@@ -3298,20 +3269,9 @@
                 <a:latin typeface="Microsoft JhengHei" panose="020B0604030504040204" pitchFamily="34" charset="-120"/>
                 <a:ea typeface="Microsoft JhengHei" panose="020B0604030504040204" pitchFamily="34" charset="-120"/>
               </a:rPr>
-              <a:t> </a:t>
-            </a:r>
-            <a:r>
-              <a:rPr lang="en-US" sz="4800" b="1" dirty="0">
-                <a:solidFill>
-                  <a:srgbClr val="000066"/>
-                </a:solidFill>
-                <a:effectLst/>
-                <a:latin typeface="Microsoft JhengHei" panose="020B0604030504040204" pitchFamily="34" charset="-120"/>
-                <a:ea typeface="Microsoft JhengHei" panose="020B0604030504040204" pitchFamily="34" charset="-120"/>
-              </a:rPr>
-              <a:t>)</a:t>
-            </a:r>
-            <a:endParaRPr lang="vi-VN" sz="4800" b="1" dirty="0">
+              <a:t> )</a:t>
+            </a:r>
+            <a:endParaRPr lang="vi-VN" sz="3600" b="1" dirty="0">
               <a:solidFill>
                 <a:srgbClr val="000066"/>
               </a:solidFill>
@@ -3408,13 +3368,6 @@
               </a:rPr>
               <a:t>要高興歡喜   要高興歡喜</a:t>
             </a:r>
-            <a:endParaRPr lang="zh-TW" altLang="en-US" sz="6400" b="1" dirty="0">
-              <a:solidFill>
-                <a:srgbClr val="000066"/>
-              </a:solidFill>
-              <a:latin typeface="微軟正黑體" pitchFamily="34" charset="-120"/>
-              <a:ea typeface="微軟正黑體" pitchFamily="34" charset="-120"/>
-            </a:endParaRPr>
           </a:p>
         </p:txBody>
       </p:sp>
@@ -3426,8 +3379,8 @@
         </p:nvSpPr>
         <p:spPr>
           <a:xfrm>
-            <a:off x="0" y="5157193"/>
-            <a:ext cx="12192000" cy="830997"/>
+            <a:off x="0" y="5249526"/>
+            <a:ext cx="12192000" cy="646331"/>
           </a:xfrm>
           <a:prstGeom prst="rect">
             <a:avLst/>
@@ -3442,54 +3395,39 @@
           <a:p>
             <a:pPr algn="ctr"/>
             <a:r>
-              <a:rPr lang="en-US" sz="4800" b="1" dirty="0">
+              <a:rPr lang="en-US" sz="3600" b="1" dirty="0">
                 <a:solidFill>
                   <a:srgbClr val="000066"/>
                 </a:solidFill>
-                <a:effectLst/>
                 <a:latin typeface="Microsoft JhengHei" panose="020B0604030504040204" pitchFamily="34" charset="-120"/>
                 <a:ea typeface="Microsoft JhengHei" panose="020B0604030504040204" pitchFamily="34" charset="-120"/>
               </a:rPr>
               <a:t>( </a:t>
             </a:r>
             <a:r>
-              <a:rPr lang="zh-CN" altLang="en-US" sz="4800" b="1" dirty="0">
+              <a:rPr lang="zh-CN" altLang="en-US" sz="3600" b="1" dirty="0">
                 <a:solidFill>
                   <a:srgbClr val="000066"/>
                 </a:solidFill>
-                <a:effectLst/>
                 <a:latin typeface="Microsoft JhengHei" panose="020B0604030504040204" pitchFamily="34" charset="-120"/>
                 <a:ea typeface="Microsoft JhengHei" panose="020B0604030504040204" pitchFamily="34" charset="-120"/>
               </a:rPr>
-              <a:t>正</a:t>
-            </a:r>
-            <a:r>
-              <a:rPr lang="en-US" sz="4800" b="1" dirty="0">
+              <a:t>正歌</a:t>
+            </a:r>
+            <a:r>
+              <a:rPr lang="en-US" sz="3600" b="1" dirty="0">
                 <a:solidFill>
                   <a:srgbClr val="000066"/>
                 </a:solidFill>
-                <a:effectLst/>
                 <a:latin typeface="Microsoft JhengHei" panose="020B0604030504040204" pitchFamily="34" charset="-120"/>
                 <a:ea typeface="Microsoft JhengHei" panose="020B0604030504040204" pitchFamily="34" charset="-120"/>
               </a:rPr>
-              <a:t> </a:t>
-            </a:r>
-            <a:r>
-              <a:rPr lang="en-US" sz="4800" b="1" dirty="0">
-                <a:solidFill>
-                  <a:srgbClr val="000066"/>
-                </a:solidFill>
-                <a:effectLst/>
-                <a:latin typeface="Microsoft JhengHei" panose="020B0604030504040204" pitchFamily="34" charset="-120"/>
-                <a:ea typeface="Microsoft JhengHei" panose="020B0604030504040204" pitchFamily="34" charset="-120"/>
-              </a:rPr>
-              <a:t>)</a:t>
-            </a:r>
-            <a:endParaRPr lang="vi-VN" sz="4800" b="1" dirty="0">
+              <a:t> )</a:t>
+            </a:r>
+            <a:endParaRPr lang="vi-VN" sz="3600" b="1" dirty="0">
               <a:solidFill>
                 <a:srgbClr val="000066"/>
               </a:solidFill>
-              <a:effectLst/>
               <a:ea typeface="Microsoft JhengHei" panose="020B0604030504040204" pitchFamily="34" charset="-120"/>
             </a:endParaRPr>
           </a:p>
@@ -3582,13 +3520,6 @@
               </a:rPr>
               <a:t>我們在其中要高興歡喜</a:t>
             </a:r>
-            <a:endParaRPr lang="zh-TW" altLang="en-US" sz="6400" b="1" dirty="0">
-              <a:solidFill>
-                <a:srgbClr val="000066"/>
-              </a:solidFill>
-              <a:latin typeface="微軟正黑體" pitchFamily="34" charset="-120"/>
-              <a:ea typeface="微軟正黑體" pitchFamily="34" charset="-120"/>
-            </a:endParaRPr>
           </a:p>
         </p:txBody>
       </p:sp>
@@ -3600,8 +3531,8 @@
         </p:nvSpPr>
         <p:spPr>
           <a:xfrm>
-            <a:off x="0" y="5157193"/>
-            <a:ext cx="12192000" cy="830997"/>
+            <a:off x="0" y="5249526"/>
+            <a:ext cx="12192000" cy="646331"/>
           </a:xfrm>
           <a:prstGeom prst="rect">
             <a:avLst/>
@@ -3616,54 +3547,39 @@
           <a:p>
             <a:pPr algn="ctr"/>
             <a:r>
-              <a:rPr lang="en-US" sz="4800" b="1" dirty="0">
+              <a:rPr lang="en-US" sz="3600" b="1" dirty="0">
                 <a:solidFill>
                   <a:srgbClr val="000066"/>
                 </a:solidFill>
-                <a:effectLst/>
                 <a:latin typeface="Microsoft JhengHei" panose="020B0604030504040204" pitchFamily="34" charset="-120"/>
                 <a:ea typeface="Microsoft JhengHei" panose="020B0604030504040204" pitchFamily="34" charset="-120"/>
               </a:rPr>
               <a:t>( </a:t>
             </a:r>
             <a:r>
-              <a:rPr lang="zh-CN" altLang="en-US" sz="4800" b="1" dirty="0">
+              <a:rPr lang="zh-CN" altLang="en-US" sz="3600" b="1" dirty="0">
                 <a:solidFill>
                   <a:srgbClr val="000066"/>
                 </a:solidFill>
-                <a:effectLst/>
                 <a:latin typeface="Microsoft JhengHei" panose="020B0604030504040204" pitchFamily="34" charset="-120"/>
                 <a:ea typeface="Microsoft JhengHei" panose="020B0604030504040204" pitchFamily="34" charset="-120"/>
               </a:rPr>
-              <a:t>副</a:t>
-            </a:r>
-            <a:r>
-              <a:rPr lang="en-US" sz="4800" b="1" dirty="0">
+              <a:t>副歌</a:t>
+            </a:r>
+            <a:r>
+              <a:rPr lang="en-US" sz="3600" b="1" dirty="0">
                 <a:solidFill>
                   <a:srgbClr val="000066"/>
                 </a:solidFill>
-                <a:effectLst/>
                 <a:latin typeface="Microsoft JhengHei" panose="020B0604030504040204" pitchFamily="34" charset="-120"/>
                 <a:ea typeface="Microsoft JhengHei" panose="020B0604030504040204" pitchFamily="34" charset="-120"/>
               </a:rPr>
-              <a:t> </a:t>
-            </a:r>
-            <a:r>
-              <a:rPr lang="en-US" sz="4800" b="1" dirty="0">
-                <a:solidFill>
-                  <a:srgbClr val="000066"/>
-                </a:solidFill>
-                <a:effectLst/>
-                <a:latin typeface="Microsoft JhengHei" panose="020B0604030504040204" pitchFamily="34" charset="-120"/>
-                <a:ea typeface="Microsoft JhengHei" panose="020B0604030504040204" pitchFamily="34" charset="-120"/>
-              </a:rPr>
-              <a:t>)</a:t>
-            </a:r>
-            <a:endParaRPr lang="vi-VN" sz="4800" b="1" dirty="0">
+              <a:t> )</a:t>
+            </a:r>
+            <a:endParaRPr lang="vi-VN" sz="3600" b="1" dirty="0">
               <a:solidFill>
                 <a:srgbClr val="000066"/>
               </a:solidFill>
-              <a:effectLst/>
               <a:ea typeface="Microsoft JhengHei" panose="020B0604030504040204" pitchFamily="34" charset="-120"/>
             </a:endParaRPr>
           </a:p>
@@ -3756,13 +3672,6 @@
               </a:rPr>
               <a:t>所定的日子</a:t>
             </a:r>
-            <a:endParaRPr lang="zh-TW" altLang="en-US" sz="6400" b="1" dirty="0">
-              <a:solidFill>
-                <a:srgbClr val="000066"/>
-              </a:solidFill>
-              <a:latin typeface="微軟正黑體" pitchFamily="34" charset="-120"/>
-              <a:ea typeface="微軟正黑體" pitchFamily="34" charset="-120"/>
-            </a:endParaRPr>
           </a:p>
         </p:txBody>
       </p:sp>
@@ -3774,8 +3683,8 @@
         </p:nvSpPr>
         <p:spPr>
           <a:xfrm>
-            <a:off x="0" y="5157193"/>
-            <a:ext cx="12192000" cy="830997"/>
+            <a:off x="0" y="5249526"/>
+            <a:ext cx="12192000" cy="646331"/>
           </a:xfrm>
           <a:prstGeom prst="rect">
             <a:avLst/>
@@ -3790,54 +3699,39 @@
           <a:p>
             <a:pPr algn="ctr"/>
             <a:r>
-              <a:rPr lang="en-US" sz="4800" b="1" dirty="0">
+              <a:rPr lang="en-US" sz="3600" b="1" dirty="0">
                 <a:solidFill>
                   <a:srgbClr val="000066"/>
                 </a:solidFill>
-                <a:effectLst/>
                 <a:latin typeface="Microsoft JhengHei" panose="020B0604030504040204" pitchFamily="34" charset="-120"/>
                 <a:ea typeface="Microsoft JhengHei" panose="020B0604030504040204" pitchFamily="34" charset="-120"/>
               </a:rPr>
               <a:t>( </a:t>
             </a:r>
             <a:r>
-              <a:rPr lang="zh-CN" altLang="en-US" sz="4800" b="1" dirty="0">
+              <a:rPr lang="zh-CN" altLang="en-US" sz="3600" b="1" dirty="0">
                 <a:solidFill>
                   <a:srgbClr val="000066"/>
                 </a:solidFill>
-                <a:effectLst/>
                 <a:latin typeface="Microsoft JhengHei" panose="020B0604030504040204" pitchFamily="34" charset="-120"/>
                 <a:ea typeface="Microsoft JhengHei" panose="020B0604030504040204" pitchFamily="34" charset="-120"/>
               </a:rPr>
-              <a:t>副</a:t>
-            </a:r>
-            <a:r>
-              <a:rPr lang="en-US" sz="4800" b="1" dirty="0">
+              <a:t>副歌</a:t>
+            </a:r>
+            <a:r>
+              <a:rPr lang="en-US" sz="3600" b="1" dirty="0">
                 <a:solidFill>
                   <a:srgbClr val="000066"/>
                 </a:solidFill>
-                <a:effectLst/>
                 <a:latin typeface="Microsoft JhengHei" panose="020B0604030504040204" pitchFamily="34" charset="-120"/>
                 <a:ea typeface="Microsoft JhengHei" panose="020B0604030504040204" pitchFamily="34" charset="-120"/>
               </a:rPr>
-              <a:t> </a:t>
-            </a:r>
-            <a:r>
-              <a:rPr lang="en-US" sz="4800" b="1" dirty="0">
-                <a:solidFill>
-                  <a:srgbClr val="000066"/>
-                </a:solidFill>
-                <a:effectLst/>
-                <a:latin typeface="Microsoft JhengHei" panose="020B0604030504040204" pitchFamily="34" charset="-120"/>
-                <a:ea typeface="Microsoft JhengHei" panose="020B0604030504040204" pitchFamily="34" charset="-120"/>
-              </a:rPr>
-              <a:t>)</a:t>
-            </a:r>
-            <a:endParaRPr lang="vi-VN" sz="4800" b="1" dirty="0">
+              <a:t> )</a:t>
+            </a:r>
+            <a:endParaRPr lang="vi-VN" sz="3600" b="1" dirty="0">
               <a:solidFill>
                 <a:srgbClr val="000066"/>
               </a:solidFill>
-              <a:effectLst/>
               <a:ea typeface="Microsoft JhengHei" panose="020B0604030504040204" pitchFamily="34" charset="-120"/>
             </a:endParaRPr>
           </a:p>
